--- a/dist/초4/영어/이해와상호작용/초4_영어_이해와상호작용_02_물건위치묻고답하기_학생용.pptx
+++ b/dist/초4/영어/이해와상호작용/초4_영어_이해와상호작용_02_물건위치묻고답하기_학생용.pptx
@@ -119,20 +119,20 @@
   <p:extLst>
     <p:ext uri="{521415D9-36F7-43E2-AB2F-B90AF26B5E84}">
       <p14:sectionLst xmlns:p14="http://schemas.microsoft.com/office/powerpoint/2010/main">
-        <p14:section name="도입" id="{68309bc7-0718-657d-581d-12cf1b943665}">
+        <p14:section name="도입" id="{0e1f8ae0-1633-0ad6-dff9-0a1e0a730960}">
           <p14:sldIdLst>
             <p14:sldId id="256"/>
             <p14:sldId id="257"/>
           </p14:sldIdLst>
         </p14:section>
-        <p14:section name="개념" id="{c33de54f-ccd4-aca6-5815-cd491bee8ee6}">
+        <p14:section name="개념" id="{831c0b9a-d92b-d0f8-049e-bf871c905d31}">
           <p14:sldIdLst>
             <p14:sldId id="258"/>
             <p14:sldId id="259"/>
             <p14:sldId id="260"/>
           </p14:sldIdLst>
         </p14:section>
-        <p14:section name="연습" id="{07383679-1ce5-3d90-ed3e-05abb6602db3}">
+        <p14:section name="연습" id="{af90ca6c-9645-a847-52cf-0b909714d8ed}">
           <p14:sldIdLst>
             <p14:sldId id="261"/>
             <p14:sldId id="262"/>
@@ -140,18 +140,18 @@
             <p14:sldId id="264"/>
           </p14:sldIdLst>
         </p14:section>
-        <p14:section name="확인" id="{3eac2c18-152b-dbd8-9a8b-c45feded22dd}">
+        <p14:section name="확인" id="{58e7ae0f-c0b9-6cc9-c588-b6f991fd1f31}">
           <p14:sldIdLst>
             <p14:sldId id="265"/>
             <p14:sldId id="266"/>
           </p14:sldIdLst>
         </p14:section>
-        <p14:section name="정리" id="{7e2ce2e0-daa6-759e-adf8-6fecfe1d4090}">
+        <p14:section name="정리" id="{1b963739-cef9-e425-e880-0570dd929992}">
           <p14:sldIdLst>
             <p14:sldId id="267"/>
           </p14:sldIdLst>
         </p14:section>
-        <p14:section name="보충" id="{1f4121a9-8367-3180-d3d2-392d34a14c9c}">
+        <p14:section name="보충" id="{76ee6284-4879-af80-ba6e-d7abead4a3ff}">
           <p14:sldIdLst>
             <p14:sldId id="268"/>
           </p14:sldIdLst>
